--- a/artifacts/semantic_revision_20261022/pptx/Figure09_Semantic.pptx
+++ b/artifacts/semantic_revision_20261022/pptx/Figure09_Semantic.pptx
@@ -3536,6 +3536,10 @@
                 <a:round/>
               </a:ln>
             </p:spPr>
+            <p:txBody xmlns:a="http://schemas.openxmlformats.org/drawingml/2006/main">
+              <a:bodyPr/>
+              <a:p/>
+            </p:txBody>
           </p:sp>
           <p:sp>
             <p:nvSpPr>
@@ -3686,7 +3690,7 @@
                     <a:solidFill>
                       <a:srgbClr val="FFFFFF"/>
                     </a:solidFill>
-                    <a:latin typeface="Arial"/>
+                    <a:latin typeface="Times New Roman"/>
                     <a:ea typeface="Arial"/>
                     <a:cs typeface="Arial"/>
                   </a:rPr>
@@ -3844,7 +3848,7 @@
                     <a:solidFill>
                       <a:srgbClr val="24272A"/>
                     </a:solidFill>
-                    <a:latin typeface="Comic Sans MS"/>
+                    <a:latin typeface="Times New Roman"/>
                     <a:ea typeface="Comic Sans MS"/>
                     <a:cs typeface="Comic Sans MS"/>
                   </a:rPr>
@@ -3907,6 +3911,10 @@
                   <a:round/>
                 </a:ln>
               </p:spPr>
+              <p:txBody xmlns:a="http://schemas.openxmlformats.org/drawingml/2006/main">
+                <a:bodyPr/>
+                <a:p/>
+              </p:txBody>
             </p:sp>
             <p:sp>
               <p:nvSpPr>
@@ -3948,6 +3956,10 @@
                   <a:round/>
                 </a:ln>
               </p:spPr>
+              <p:txBody xmlns:a="http://schemas.openxmlformats.org/drawingml/2006/main">
+                <a:bodyPr/>
+                <a:p/>
+              </p:txBody>
             </p:sp>
             <p:sp>
               <p:nvSpPr>
@@ -3989,6 +4001,10 @@
                   <a:round/>
                 </a:ln>
               </p:spPr>
+              <p:txBody xmlns:a="http://schemas.openxmlformats.org/drawingml/2006/main">
+                <a:bodyPr/>
+                <a:p/>
+              </p:txBody>
             </p:sp>
           </p:grpSp>
           <p:sp>
@@ -4140,7 +4156,7 @@
                     <a:solidFill>
                       <a:srgbClr val="24272A"/>
                     </a:solidFill>
-                    <a:latin typeface="Arial"/>
+                    <a:latin typeface="Times New Roman"/>
                     <a:ea typeface="Arial"/>
                     <a:cs typeface="Arial"/>
                   </a:rPr>
@@ -4192,6 +4208,10 @@
                 <a:round/>
               </a:ln>
             </p:spPr>
+            <p:txBody xmlns:a="http://schemas.openxmlformats.org/drawingml/2006/main">
+              <a:bodyPr/>
+              <a:p/>
+            </p:txBody>
           </p:sp>
           <p:sp>
             <p:nvSpPr>
@@ -4342,7 +4362,7 @@
                     <a:solidFill>
                       <a:srgbClr val="626A6F"/>
                     </a:solidFill>
-                    <a:latin typeface="Arial"/>
+                    <a:latin typeface="Times New Roman"/>
                     <a:ea typeface="Arial"/>
                     <a:cs typeface="Arial"/>
                   </a:rPr>
@@ -4500,7 +4520,7 @@
                     <a:solidFill>
                       <a:srgbClr val="626A6F"/>
                     </a:solidFill>
-                    <a:latin typeface="Arial"/>
+                    <a:latin typeface="Times New Roman"/>
                     <a:ea typeface="Arial"/>
                     <a:cs typeface="Arial"/>
                   </a:rPr>
@@ -4732,6 +4752,10 @@
                 <a:round/>
               </a:ln>
             </p:spPr>
+            <p:txBody xmlns:a="http://schemas.openxmlformats.org/drawingml/2006/main">
+              <a:bodyPr/>
+              <a:p/>
+            </p:txBody>
           </p:sp>
           <p:grpSp>
             <p:nvGrpSpPr>
@@ -4787,6 +4811,10 @@
                   <a:round/>
                 </a:ln>
               </p:spPr>
+              <p:txBody xmlns:a="http://schemas.openxmlformats.org/drawingml/2006/main">
+                <a:bodyPr/>
+                <a:p/>
+              </p:txBody>
             </p:sp>
             <p:sp>
               <p:nvSpPr>
@@ -4828,6 +4856,10 @@
                   <a:round/>
                 </a:ln>
               </p:spPr>
+              <p:txBody xmlns:a="http://schemas.openxmlformats.org/drawingml/2006/main">
+                <a:bodyPr/>
+                <a:p/>
+              </p:txBody>
             </p:sp>
             <p:sp>
               <p:nvSpPr>
@@ -4869,6 +4901,10 @@
                   <a:round/>
                 </a:ln>
               </p:spPr>
+              <p:txBody xmlns:a="http://schemas.openxmlformats.org/drawingml/2006/main">
+                <a:bodyPr/>
+                <a:p/>
+              </p:txBody>
             </p:sp>
           </p:grpSp>
           <p:sp>
@@ -5020,7 +5056,7 @@
                     <a:solidFill>
                       <a:srgbClr val="24272A"/>
                     </a:solidFill>
-                    <a:latin typeface="Arial"/>
+                    <a:latin typeface="Times New Roman"/>
                     <a:ea typeface="Arial"/>
                     <a:cs typeface="Arial"/>
                   </a:rPr>
@@ -5075,6 +5111,10 @@
               <a:effectRef xmlns:a="http://schemas.openxmlformats.org/drawingml/2006/main" idx="10"/>
               <a:fontRef xmlns:a="http://schemas.openxmlformats.org/drawingml/2006/main" idx="major"/>
             </p:style>
+            <p:txBody xmlns:a="http://schemas.openxmlformats.org/drawingml/2006/main">
+              <a:bodyPr/>
+              <a:p/>
+            </p:txBody>
           </p:sp>
           <p:sp>
             <p:nvSpPr>
@@ -5122,6 +5162,10 @@
                 <a:round/>
               </a:ln>
             </p:spPr>
+            <p:txBody xmlns:a="http://schemas.openxmlformats.org/drawingml/2006/main">
+              <a:bodyPr/>
+              <a:p/>
+            </p:txBody>
           </p:sp>
           <p:sp>
             <p:nvSpPr>
@@ -5272,7 +5316,7 @@
                     <a:solidFill>
                       <a:srgbClr val="24272A"/>
                     </a:solidFill>
-                    <a:latin typeface="Arial"/>
+                    <a:latin typeface="Times New Roman"/>
                     <a:ea typeface="Arial"/>
                     <a:cs typeface="Arial"/>
                   </a:rPr>
@@ -5318,6 +5362,10 @@
               <a:effectRef xmlns:a="http://schemas.openxmlformats.org/drawingml/2006/main" idx="11"/>
               <a:fontRef xmlns:a="http://schemas.openxmlformats.org/drawingml/2006/main" idx="major"/>
             </p:style>
+            <p:txBody xmlns:a="http://schemas.openxmlformats.org/drawingml/2006/main">
+              <a:bodyPr/>
+              <a:p/>
+            </p:txBody>
           </p:sp>
           <p:sp>
             <p:nvSpPr>
@@ -5468,7 +5516,7 @@
                     <a:solidFill>
                       <a:srgbClr val="3F6C85"/>
                     </a:solidFill>
-                    <a:latin typeface="Arial"/>
+                    <a:latin typeface="Times New Roman"/>
                     <a:ea typeface="Arial"/>
                     <a:cs typeface="Arial"/>
                   </a:rPr>
@@ -5700,6 +5748,10 @@
                 <a:round/>
               </a:ln>
             </p:spPr>
+            <p:txBody xmlns:a="http://schemas.openxmlformats.org/drawingml/2006/main">
+              <a:bodyPr/>
+              <a:p/>
+            </p:txBody>
           </p:sp>
           <p:sp>
             <p:nvSpPr>
@@ -5744,6 +5796,10 @@
                 <a:round/>
               </a:ln>
             </p:spPr>
+            <p:txBody xmlns:a="http://schemas.openxmlformats.org/drawingml/2006/main">
+              <a:bodyPr/>
+              <a:p/>
+            </p:txBody>
           </p:sp>
           <p:sp>
             <p:nvSpPr>
@@ -5894,7 +5950,7 @@
                     <a:solidFill>
                       <a:srgbClr val="24272A"/>
                     </a:solidFill>
-                    <a:latin typeface="Arial"/>
+                    <a:latin typeface="Times New Roman"/>
                     <a:ea typeface="Arial"/>
                     <a:cs typeface="Arial"/>
                   </a:rPr>
@@ -5949,6 +6005,10 @@
                 <a:round/>
               </a:ln>
             </p:spPr>
+            <p:txBody xmlns:a="http://schemas.openxmlformats.org/drawingml/2006/main">
+              <a:bodyPr/>
+              <a:p/>
+            </p:txBody>
           </p:sp>
           <p:sp>
             <p:nvSpPr>
@@ -6099,7 +6159,7 @@
                     <a:solidFill>
                       <a:srgbClr val="FFFFFF"/>
                     </a:solidFill>
-                    <a:latin typeface="Arial"/>
+                    <a:latin typeface="Times New Roman"/>
                     <a:ea typeface="Arial"/>
                     <a:cs typeface="Arial"/>
                   </a:rPr>
@@ -6257,7 +6317,7 @@
                     <a:solidFill>
                       <a:srgbClr val="24272A"/>
                     </a:solidFill>
-                    <a:latin typeface="Comic Sans MS"/>
+                    <a:latin typeface="Times New Roman"/>
                     <a:ea typeface="Comic Sans MS"/>
                     <a:cs typeface="Comic Sans MS"/>
                   </a:rPr>
@@ -6320,6 +6380,10 @@
                   <a:round/>
                 </a:ln>
               </p:spPr>
+              <p:txBody xmlns:a="http://schemas.openxmlformats.org/drawingml/2006/main">
+                <a:bodyPr/>
+                <a:p/>
+              </p:txBody>
             </p:sp>
             <p:sp>
               <p:nvSpPr>
@@ -6361,6 +6425,10 @@
                   <a:round/>
                 </a:ln>
               </p:spPr>
+              <p:txBody xmlns:a="http://schemas.openxmlformats.org/drawingml/2006/main">
+                <a:bodyPr/>
+                <a:p/>
+              </p:txBody>
             </p:sp>
             <p:sp>
               <p:nvSpPr>
@@ -6402,6 +6470,10 @@
                   <a:round/>
                 </a:ln>
               </p:spPr>
+              <p:txBody xmlns:a="http://schemas.openxmlformats.org/drawingml/2006/main">
+                <a:bodyPr/>
+                <a:p/>
+              </p:txBody>
             </p:sp>
             <p:sp>
               <p:nvSpPr>
@@ -6443,6 +6515,10 @@
                   <a:round/>
                 </a:ln>
               </p:spPr>
+              <p:txBody xmlns:a="http://schemas.openxmlformats.org/drawingml/2006/main">
+                <a:bodyPr/>
+                <a:p/>
+              </p:txBody>
             </p:sp>
             <p:sp>
               <p:nvSpPr>
@@ -6484,6 +6560,10 @@
                   <a:round/>
                 </a:ln>
               </p:spPr>
+              <p:txBody xmlns:a="http://schemas.openxmlformats.org/drawingml/2006/main">
+                <a:bodyPr/>
+                <a:p/>
+              </p:txBody>
             </p:sp>
             <p:sp>
               <p:nvSpPr>
@@ -6525,6 +6605,10 @@
                   <a:round/>
                 </a:ln>
               </p:spPr>
+              <p:txBody xmlns:a="http://schemas.openxmlformats.org/drawingml/2006/main">
+                <a:bodyPr/>
+                <a:p/>
+              </p:txBody>
             </p:sp>
             <p:sp>
               <p:nvSpPr>
@@ -6566,6 +6650,10 @@
                   <a:round/>
                 </a:ln>
               </p:spPr>
+              <p:txBody xmlns:a="http://schemas.openxmlformats.org/drawingml/2006/main">
+                <a:bodyPr/>
+                <a:p/>
+              </p:txBody>
             </p:sp>
             <p:sp>
               <p:nvSpPr>
@@ -6607,6 +6695,10 @@
                   <a:round/>
                 </a:ln>
               </p:spPr>
+              <p:txBody xmlns:a="http://schemas.openxmlformats.org/drawingml/2006/main">
+                <a:bodyPr/>
+                <a:p/>
+              </p:txBody>
             </p:sp>
             <p:sp>
               <p:nvSpPr>
@@ -6648,6 +6740,10 @@
                   <a:round/>
                 </a:ln>
               </p:spPr>
+              <p:txBody xmlns:a="http://schemas.openxmlformats.org/drawingml/2006/main">
+                <a:bodyPr/>
+                <a:p/>
+              </p:txBody>
             </p:sp>
           </p:grpSp>
           <p:sp>
@@ -6799,7 +6895,7 @@
                     <a:solidFill>
                       <a:srgbClr val="24272A"/>
                     </a:solidFill>
-                    <a:latin typeface="Arial"/>
+                    <a:latin typeface="Times New Roman"/>
                     <a:ea typeface="Arial"/>
                     <a:cs typeface="Arial"/>
                   </a:rPr>
@@ -6862,6 +6958,10 @@
                   <a:round/>
                 </a:ln>
               </p:spPr>
+              <p:txBody xmlns:a="http://schemas.openxmlformats.org/drawingml/2006/main">
+                <a:bodyPr/>
+                <a:p/>
+              </p:txBody>
             </p:sp>
             <p:sp>
               <p:nvSpPr>
@@ -6903,6 +7003,10 @@
                   <a:round/>
                 </a:ln>
               </p:spPr>
+              <p:txBody xmlns:a="http://schemas.openxmlformats.org/drawingml/2006/main">
+                <a:bodyPr/>
+                <a:p/>
+              </p:txBody>
             </p:sp>
             <p:sp>
               <p:nvSpPr>
@@ -6944,6 +7048,10 @@
                   <a:round/>
                 </a:ln>
               </p:spPr>
+              <p:txBody xmlns:a="http://schemas.openxmlformats.org/drawingml/2006/main">
+                <a:bodyPr/>
+                <a:p/>
+              </p:txBody>
             </p:sp>
             <p:sp>
               <p:nvSpPr>
@@ -6985,6 +7093,10 @@
                   <a:round/>
                 </a:ln>
               </p:spPr>
+              <p:txBody xmlns:a="http://schemas.openxmlformats.org/drawingml/2006/main">
+                <a:bodyPr/>
+                <a:p/>
+              </p:txBody>
             </p:sp>
             <p:sp>
               <p:nvSpPr>
@@ -7026,6 +7138,10 @@
                   <a:round/>
                 </a:ln>
               </p:spPr>
+              <p:txBody xmlns:a="http://schemas.openxmlformats.org/drawingml/2006/main">
+                <a:bodyPr/>
+                <a:p/>
+              </p:txBody>
             </p:sp>
             <p:sp>
               <p:nvSpPr>
@@ -7067,6 +7183,10 @@
                   <a:round/>
                 </a:ln>
               </p:spPr>
+              <p:txBody xmlns:a="http://schemas.openxmlformats.org/drawingml/2006/main">
+                <a:bodyPr/>
+                <a:p/>
+              </p:txBody>
             </p:sp>
           </p:grpSp>
           <p:sp>
@@ -7218,7 +7338,7 @@
                     <a:solidFill>
                       <a:srgbClr val="24272A"/>
                     </a:solidFill>
-                    <a:latin typeface="Arial"/>
+                    <a:latin typeface="Times New Roman"/>
                     <a:ea typeface="Arial"/>
                     <a:cs typeface="Arial"/>
                   </a:rPr>
@@ -7294,6 +7414,10 @@
                   <a:round/>
                 </a:ln>
               </p:spPr>
+              <p:txBody xmlns:a="http://schemas.openxmlformats.org/drawingml/2006/main">
+                <a:bodyPr/>
+                <a:p/>
+              </p:txBody>
             </p:sp>
             <p:sp>
               <p:nvSpPr>
@@ -7348,6 +7472,10 @@
                   <a:round/>
                 </a:ln>
               </p:spPr>
+              <p:txBody xmlns:a="http://schemas.openxmlformats.org/drawingml/2006/main">
+                <a:bodyPr/>
+                <a:p/>
+              </p:txBody>
             </p:sp>
           </p:grpSp>
           <p:sp>
@@ -7499,7 +7627,7 @@
                     <a:solidFill>
                       <a:srgbClr val="24272A"/>
                     </a:solidFill>
-                    <a:latin typeface="Arial"/>
+                    <a:latin typeface="Times New Roman"/>
                     <a:ea typeface="Arial"/>
                     <a:cs typeface="Arial"/>
                   </a:rPr>
@@ -7565,6 +7693,10 @@
                   <a:round/>
                 </a:ln>
               </p:spPr>
+              <p:txBody xmlns:a="http://schemas.openxmlformats.org/drawingml/2006/main">
+                <a:bodyPr/>
+                <a:p/>
+              </p:txBody>
             </p:sp>
             <p:sp>
               <p:nvSpPr>
@@ -7609,6 +7741,10 @@
                   <a:round/>
                 </a:ln>
               </p:spPr>
+              <p:txBody xmlns:a="http://schemas.openxmlformats.org/drawingml/2006/main">
+                <a:bodyPr/>
+                <a:p/>
+              </p:txBody>
             </p:sp>
             <p:sp>
               <p:nvSpPr>
@@ -7666,6 +7802,10 @@
                   <a:round/>
                 </a:ln>
               </p:spPr>
+              <p:txBody xmlns:a="http://schemas.openxmlformats.org/drawingml/2006/main">
+                <a:bodyPr/>
+                <a:p/>
+              </p:txBody>
             </p:sp>
             <p:sp>
               <p:nvSpPr>
@@ -7717,6 +7857,10 @@
                   <a:round/>
                 </a:ln>
               </p:spPr>
+              <p:txBody xmlns:a="http://schemas.openxmlformats.org/drawingml/2006/main">
+                <a:bodyPr/>
+                <a:p/>
+              </p:txBody>
             </p:sp>
             <p:sp>
               <p:nvSpPr>
@@ -7766,6 +7910,10 @@
                   <a:round/>
                 </a:ln>
               </p:spPr>
+              <p:txBody xmlns:a="http://schemas.openxmlformats.org/drawingml/2006/main">
+                <a:bodyPr/>
+                <a:p/>
+              </p:txBody>
             </p:sp>
           </p:grpSp>
           <p:sp>
@@ -7917,7 +8065,7 @@
                     <a:solidFill>
                       <a:srgbClr val="24272A"/>
                     </a:solidFill>
-                    <a:latin typeface="Arial"/>
+                    <a:latin typeface="Times New Roman"/>
                     <a:ea typeface="Arial"/>
                     <a:cs typeface="Arial"/>
                   </a:rPr>
@@ -8075,7 +8223,7 @@
                     <a:solidFill>
                       <a:srgbClr val="626A6F"/>
                     </a:solidFill>
-                    <a:latin typeface="Arial"/>
+                    <a:latin typeface="Times New Roman"/>
                     <a:ea typeface="Arial"/>
                     <a:cs typeface="Arial"/>
                   </a:rPr>
@@ -8115,6 +8263,10 @@
                 <a:round/>
               </a:ln>
             </p:spPr>
+            <p:txBody xmlns:a="http://schemas.openxmlformats.org/drawingml/2006/main">
+              <a:bodyPr/>
+              <a:p/>
+            </p:txBody>
           </p:sp>
           <p:sp>
             <p:nvSpPr>
@@ -8265,7 +8417,7 @@
                     <a:solidFill>
                       <a:srgbClr val="328372"/>
                     </a:solidFill>
-                    <a:latin typeface="Arial"/>
+                    <a:latin typeface="Times New Roman"/>
                     <a:ea typeface="Arial"/>
                     <a:cs typeface="Arial"/>
                   </a:rPr>
@@ -8423,7 +8575,7 @@
                     <a:solidFill>
                       <a:srgbClr val="24272A"/>
                     </a:solidFill>
-                    <a:latin typeface="Arial"/>
+                    <a:latin typeface="Times New Roman"/>
                     <a:ea typeface="Arial"/>
                     <a:cs typeface="Arial"/>
                   </a:rPr>
@@ -8655,6 +8807,10 @@
                 <a:round/>
               </a:ln>
             </p:spPr>
+            <p:txBody xmlns:a="http://schemas.openxmlformats.org/drawingml/2006/main">
+              <a:bodyPr/>
+              <a:p/>
+            </p:txBody>
           </p:sp>
           <p:sp>
             <p:nvSpPr>
@@ -8805,7 +8961,7 @@
                     <a:solidFill>
                       <a:srgbClr val="626A6F"/>
                     </a:solidFill>
-                    <a:latin typeface="Arial"/>
+                    <a:latin typeface="Times New Roman"/>
                     <a:ea typeface="Arial"/>
                     <a:cs typeface="Arial"/>
                   </a:rPr>
@@ -8828,7 +8984,7 @@
                     <a:solidFill>
                       <a:srgbClr val="626A6F"/>
                     </a:solidFill>
-                    <a:latin typeface="Arial"/>
+                    <a:latin typeface="Times New Roman"/>
                     <a:ea typeface="Arial"/>
                     <a:cs typeface="Arial"/>
                   </a:rPr>
@@ -8868,6 +9024,10 @@
                 <a:round/>
               </a:ln>
             </p:spPr>
+            <p:txBody xmlns:a="http://schemas.openxmlformats.org/drawingml/2006/main">
+              <a:bodyPr/>
+              <a:p/>
+            </p:txBody>
           </p:sp>
           <p:sp>
             <p:nvSpPr>
@@ -9018,7 +9178,7 @@
                     <a:solidFill>
                       <a:srgbClr val="B76C4D"/>
                     </a:solidFill>
-                    <a:latin typeface="Arial"/>
+                    <a:latin typeface="Times New Roman"/>
                     <a:ea typeface="Arial"/>
                     <a:cs typeface="Arial"/>
                   </a:rPr>
@@ -9176,7 +9336,7 @@
                     <a:solidFill>
                       <a:srgbClr val="24272A"/>
                     </a:solidFill>
-                    <a:latin typeface="Arial"/>
+                    <a:latin typeface="Times New Roman"/>
                     <a:ea typeface="Arial"/>
                     <a:cs typeface="Arial"/>
                   </a:rPr>
@@ -9408,6 +9568,10 @@
                 <a:round/>
               </a:ln>
             </p:spPr>
+            <p:txBody xmlns:a="http://schemas.openxmlformats.org/drawingml/2006/main">
+              <a:bodyPr/>
+              <a:p/>
+            </p:txBody>
           </p:sp>
           <p:sp>
             <p:nvSpPr>
@@ -9558,7 +9722,7 @@
                     <a:solidFill>
                       <a:srgbClr val="626A6F"/>
                     </a:solidFill>
-                    <a:latin typeface="Arial"/>
+                    <a:latin typeface="Times New Roman"/>
                     <a:ea typeface="Arial"/>
                     <a:cs typeface="Arial"/>
                   </a:rPr>
@@ -9581,7 +9745,7 @@
                     <a:solidFill>
                       <a:srgbClr val="626A6F"/>
                     </a:solidFill>
-                    <a:latin typeface="Arial"/>
+                    <a:latin typeface="Times New Roman"/>
                     <a:ea typeface="Arial"/>
                     <a:cs typeface="Arial"/>
                   </a:rPr>
@@ -9636,6 +9800,10 @@
                 <a:round/>
               </a:ln>
             </p:spPr>
+            <p:txBody xmlns:a="http://schemas.openxmlformats.org/drawingml/2006/main">
+              <a:bodyPr/>
+              <a:p/>
+            </p:txBody>
           </p:sp>
           <p:sp>
             <p:nvSpPr>
@@ -9786,7 +9954,7 @@
                     <a:solidFill>
                       <a:srgbClr val="626A6F"/>
                     </a:solidFill>
-                    <a:latin typeface="Arial"/>
+                    <a:latin typeface="Times New Roman"/>
                     <a:ea typeface="Arial"/>
                     <a:cs typeface="Arial"/>
                   </a:rPr>
@@ -9841,6 +10009,10 @@
                 <a:round/>
               </a:ln>
             </p:spPr>
+            <p:txBody xmlns:a="http://schemas.openxmlformats.org/drawingml/2006/main">
+              <a:bodyPr/>
+              <a:p/>
+            </p:txBody>
           </p:sp>
           <p:sp>
             <p:nvSpPr>
@@ -9991,7 +10163,7 @@
                     <a:solidFill>
                       <a:srgbClr val="FFFFFF"/>
                     </a:solidFill>
-                    <a:latin typeface="Arial"/>
+                    <a:latin typeface="Times New Roman"/>
                     <a:ea typeface="Arial"/>
                     <a:cs typeface="Arial"/>
                   </a:rPr>
@@ -10149,7 +10321,7 @@
                     <a:solidFill>
                       <a:srgbClr val="24272A"/>
                     </a:solidFill>
-                    <a:latin typeface="Comic Sans MS"/>
+                    <a:latin typeface="Times New Roman"/>
                     <a:ea typeface="Comic Sans MS"/>
                     <a:cs typeface="Comic Sans MS"/>
                   </a:rPr>
@@ -10254,6 +10426,10 @@
                   <a:round/>
                 </a:ln>
               </p:spPr>
+              <p:txBody xmlns:a="http://schemas.openxmlformats.org/drawingml/2006/main">
+                <a:bodyPr/>
+                <a:p/>
+              </p:txBody>
             </p:sp>
             <p:sp>
               <p:nvSpPr>
@@ -10308,6 +10484,10 @@
                   <a:round/>
                 </a:ln>
               </p:spPr>
+              <p:txBody xmlns:a="http://schemas.openxmlformats.org/drawingml/2006/main">
+                <a:bodyPr/>
+                <a:p/>
+              </p:txBody>
             </p:sp>
             <p:sp>
               <p:nvSpPr>
@@ -10352,6 +10532,10 @@
                   <a:round/>
                 </a:ln>
               </p:spPr>
+              <p:txBody xmlns:a="http://schemas.openxmlformats.org/drawingml/2006/main">
+                <a:bodyPr/>
+                <a:p/>
+              </p:txBody>
             </p:sp>
           </p:grpSp>
           <p:grpSp>
@@ -10421,6 +10605,10 @@
                   <a:round/>
                 </a:ln>
               </p:spPr>
+              <p:txBody xmlns:a="http://schemas.openxmlformats.org/drawingml/2006/main">
+                <a:bodyPr/>
+                <a:p/>
+              </p:txBody>
             </p:sp>
             <p:sp>
               <p:nvSpPr>
@@ -10475,6 +10663,10 @@
                   <a:round/>
                 </a:ln>
               </p:spPr>
+              <p:txBody xmlns:a="http://schemas.openxmlformats.org/drawingml/2006/main">
+                <a:bodyPr/>
+                <a:p/>
+              </p:txBody>
             </p:sp>
             <p:sp>
               <p:nvSpPr>
@@ -10529,6 +10721,10 @@
                   <a:round/>
                 </a:ln>
               </p:spPr>
+              <p:txBody xmlns:a="http://schemas.openxmlformats.org/drawingml/2006/main">
+                <a:bodyPr/>
+                <a:p/>
+              </p:txBody>
             </p:sp>
             <p:sp>
               <p:nvSpPr>
@@ -10583,6 +10779,10 @@
                   <a:round/>
                 </a:ln>
               </p:spPr>
+              <p:txBody xmlns:a="http://schemas.openxmlformats.org/drawingml/2006/main">
+                <a:bodyPr/>
+                <a:p/>
+              </p:txBody>
             </p:sp>
             <p:sp>
               <p:nvSpPr>
@@ -10651,6 +10851,10 @@
                   <a:round/>
                 </a:ln>
               </p:spPr>
+              <p:txBody xmlns:a="http://schemas.openxmlformats.org/drawingml/2006/main">
+                <a:bodyPr/>
+                <a:p/>
+              </p:txBody>
             </p:sp>
             <p:sp>
               <p:nvSpPr>
@@ -10729,6 +10933,10 @@
                   <a:round/>
                 </a:ln>
               </p:spPr>
+              <p:txBody xmlns:a="http://schemas.openxmlformats.org/drawingml/2006/main">
+                <a:bodyPr/>
+                <a:p/>
+              </p:txBody>
             </p:sp>
           </p:grpSp>
           <p:sp>
@@ -10880,7 +11088,7 @@
                     <a:solidFill>
                       <a:srgbClr val="24272A"/>
                     </a:solidFill>
-                    <a:latin typeface="Arial"/>
+                    <a:latin typeface="Times New Roman"/>
                     <a:ea typeface="Arial"/>
                     <a:cs typeface="Arial"/>
                   </a:rPr>
@@ -11038,7 +11246,7 @@
                     <a:solidFill>
                       <a:srgbClr val="24272A"/>
                     </a:solidFill>
-                    <a:latin typeface="Arial"/>
+                    <a:latin typeface="Times New Roman"/>
                     <a:ea typeface="Arial"/>
                     <a:cs typeface="Arial"/>
                   </a:rPr>
@@ -11090,6 +11298,10 @@
                 <a:round/>
               </a:ln>
             </p:spPr>
+            <p:txBody xmlns:a="http://schemas.openxmlformats.org/drawingml/2006/main">
+              <a:bodyPr/>
+              <a:p/>
+            </p:txBody>
           </p:sp>
           <p:sp>
             <p:nvSpPr>
@@ -11240,7 +11452,7 @@
                     <a:solidFill>
                       <a:srgbClr val="328372"/>
                     </a:solidFill>
-                    <a:latin typeface="Arial"/>
+                    <a:latin typeface="Times New Roman"/>
                     <a:ea typeface="Arial"/>
                     <a:cs typeface="Arial"/>
                   </a:rPr>
@@ -11398,7 +11610,7 @@
                     <a:solidFill>
                       <a:srgbClr val="24272A"/>
                     </a:solidFill>
-                    <a:latin typeface="Arial"/>
+                    <a:latin typeface="Times New Roman"/>
                     <a:ea typeface="Arial"/>
                     <a:cs typeface="Arial"/>
                   </a:rPr>
@@ -11447,6 +11659,10 @@
                 <a:round/>
               </a:ln>
             </p:spPr>
+            <p:txBody xmlns:a="http://schemas.openxmlformats.org/drawingml/2006/main">
+              <a:bodyPr/>
+              <a:p/>
+            </p:txBody>
           </p:sp>
           <p:sp>
             <p:nvSpPr>
@@ -11488,6 +11704,10 @@
                 <a:round/>
               </a:ln>
             </p:spPr>
+            <p:txBody xmlns:a="http://schemas.openxmlformats.org/drawingml/2006/main">
+              <a:bodyPr/>
+              <a:p/>
+            </p:txBody>
           </p:sp>
           <p:sp>
             <p:nvSpPr>
@@ -11638,7 +11858,7 @@
                     <a:solidFill>
                       <a:srgbClr val="B76C4D"/>
                     </a:solidFill>
-                    <a:latin typeface="Arial"/>
+                    <a:latin typeface="Times New Roman"/>
                     <a:ea typeface="Arial"/>
                     <a:cs typeface="Arial"/>
                   </a:rPr>
@@ -11796,7 +12016,7 @@
                     <a:solidFill>
                       <a:srgbClr val="24272A"/>
                     </a:solidFill>
-                    <a:latin typeface="Arial"/>
+                    <a:latin typeface="Times New Roman"/>
                     <a:ea typeface="Arial"/>
                     <a:cs typeface="Arial"/>
                   </a:rPr>
@@ -11872,6 +12092,10 @@
               <a:effectRef xmlns:a="http://schemas.openxmlformats.org/drawingml/2006/main" idx="10"/>
               <a:fontRef xmlns:a="http://schemas.openxmlformats.org/drawingml/2006/main" idx="major"/>
             </p:style>
+            <p:txBody xmlns:a="http://schemas.openxmlformats.org/drawingml/2006/main">
+              <a:bodyPr/>
+              <a:p/>
+            </p:txBody>
           </p:sp>
           <p:sp>
             <p:nvSpPr>
@@ -11919,6 +12143,10 @@
                 <a:round/>
               </a:ln>
             </p:spPr>
+            <p:txBody xmlns:a="http://schemas.openxmlformats.org/drawingml/2006/main">
+              <a:bodyPr/>
+              <a:p/>
+            </p:txBody>
           </p:sp>
           <p:sp>
             <p:nvSpPr>
@@ -11966,6 +12194,10 @@
               <a:effectRef xmlns:a="http://schemas.openxmlformats.org/drawingml/2006/main" idx="10"/>
               <a:fontRef xmlns:a="http://schemas.openxmlformats.org/drawingml/2006/main" idx="major"/>
             </p:style>
+            <p:txBody xmlns:a="http://schemas.openxmlformats.org/drawingml/2006/main">
+              <a:bodyPr/>
+              <a:p/>
+            </p:txBody>
           </p:sp>
           <p:sp>
             <p:nvSpPr>
@@ -12013,6 +12245,10 @@
                 <a:round/>
               </a:ln>
             </p:spPr>
+            <p:txBody xmlns:a="http://schemas.openxmlformats.org/drawingml/2006/main">
+              <a:bodyPr/>
+              <a:p/>
+            </p:txBody>
           </p:sp>
           <p:sp>
             <p:nvSpPr>
@@ -12060,6 +12296,10 @@
               <a:effectRef xmlns:a="http://schemas.openxmlformats.org/drawingml/2006/main" idx="10"/>
               <a:fontRef xmlns:a="http://schemas.openxmlformats.org/drawingml/2006/main" idx="major"/>
             </p:style>
+            <p:txBody xmlns:a="http://schemas.openxmlformats.org/drawingml/2006/main">
+              <a:bodyPr/>
+              <a:p/>
+            </p:txBody>
           </p:sp>
           <p:sp>
             <p:nvSpPr>
@@ -12107,6 +12347,10 @@
                 <a:round/>
               </a:ln>
             </p:spPr>
+            <p:txBody xmlns:a="http://schemas.openxmlformats.org/drawingml/2006/main">
+              <a:bodyPr/>
+              <a:p/>
+            </p:txBody>
           </p:sp>
           <p:sp>
             <p:nvSpPr>
@@ -12166,6 +12410,10 @@
               <a:effectRef xmlns:a="http://schemas.openxmlformats.org/drawingml/2006/main" idx="10"/>
               <a:fontRef xmlns:a="http://schemas.openxmlformats.org/drawingml/2006/main" idx="major"/>
             </p:style>
+            <p:txBody xmlns:a="http://schemas.openxmlformats.org/drawingml/2006/main">
+              <a:bodyPr/>
+              <a:p/>
+            </p:txBody>
           </p:sp>
           <p:sp>
             <p:nvSpPr>
@@ -12213,6 +12461,10 @@
                 <a:round/>
               </a:ln>
             </p:spPr>
+            <p:txBody xmlns:a="http://schemas.openxmlformats.org/drawingml/2006/main">
+              <a:bodyPr/>
+              <a:p/>
+            </p:txBody>
           </p:sp>
           <p:sp>
             <p:nvSpPr>
@@ -12245,6 +12497,10 @@
                 <a:round/>
               </a:ln>
             </p:spPr>
+            <p:txBody xmlns:a="http://schemas.openxmlformats.org/drawingml/2006/main">
+              <a:bodyPr/>
+              <a:p/>
+            </p:txBody>
           </p:sp>
           <p:sp>
             <p:nvSpPr>
@@ -12395,7 +12651,7 @@
                     <a:solidFill>
                       <a:srgbClr val="B76C4D"/>
                     </a:solidFill>
-                    <a:latin typeface="Arial"/>
+                    <a:latin typeface="Times New Roman"/>
                     <a:ea typeface="Arial"/>
                     <a:cs typeface="Arial"/>
                   </a:rPr>
@@ -12456,6 +12712,10 @@
               <a:effectRef xmlns:a="http://schemas.openxmlformats.org/drawingml/2006/main" idx="11"/>
               <a:fontRef xmlns:a="http://schemas.openxmlformats.org/drawingml/2006/main" idx="major"/>
             </p:style>
+            <p:txBody xmlns:a="http://schemas.openxmlformats.org/drawingml/2006/main">
+              <a:bodyPr/>
+              <a:p/>
+            </p:txBody>
           </p:sp>
           <p:grpSp>
             <p:nvGrpSpPr>
@@ -12531,6 +12791,10 @@
                   <a:round/>
                 </a:ln>
               </p:spPr>
+              <p:txBody xmlns:a="http://schemas.openxmlformats.org/drawingml/2006/main">
+                <a:bodyPr/>
+                <a:p/>
+              </p:txBody>
             </p:sp>
             <p:sp>
               <p:nvSpPr>
@@ -12592,6 +12856,10 @@
                   <a:round/>
                 </a:ln>
               </p:spPr>
+              <p:txBody xmlns:a="http://schemas.openxmlformats.org/drawingml/2006/main">
+                <a:bodyPr/>
+                <a:p/>
+              </p:txBody>
             </p:sp>
             <p:sp>
               <p:nvSpPr>
@@ -12633,6 +12901,10 @@
                   <a:round/>
                 </a:ln>
               </p:spPr>
+              <p:txBody xmlns:a="http://schemas.openxmlformats.org/drawingml/2006/main">
+                <a:bodyPr/>
+                <a:p/>
+              </p:txBody>
             </p:sp>
             <p:sp>
               <p:nvSpPr>
@@ -12690,6 +12962,10 @@
                   <a:round/>
                 </a:ln>
               </p:spPr>
+              <p:txBody xmlns:a="http://schemas.openxmlformats.org/drawingml/2006/main">
+                <a:bodyPr/>
+                <a:p/>
+              </p:txBody>
             </p:sp>
             <p:sp>
               <p:nvSpPr>
@@ -12756,6 +13032,10 @@
                   <a:round/>
                 </a:ln>
               </p:spPr>
+              <p:txBody xmlns:a="http://schemas.openxmlformats.org/drawingml/2006/main">
+                <a:bodyPr/>
+                <a:p/>
+              </p:txBody>
             </p:sp>
             <p:sp>
               <p:nvSpPr>
@@ -12822,6 +13102,10 @@
                   <a:round/>
                 </a:ln>
               </p:spPr>
+              <p:txBody xmlns:a="http://schemas.openxmlformats.org/drawingml/2006/main">
+                <a:bodyPr/>
+                <a:p/>
+              </p:txBody>
             </p:sp>
           </p:grpSp>
           <p:sp>
@@ -12973,7 +13257,7 @@
                     <a:solidFill>
                       <a:srgbClr val="24272A"/>
                     </a:solidFill>
-                    <a:latin typeface="Comic Sans MS"/>
+                    <a:latin typeface="Times New Roman"/>
                     <a:ea typeface="Comic Sans MS"/>
                     <a:cs typeface="Comic Sans MS"/>
                   </a:rPr>
@@ -13131,7 +13415,7 @@
                     <a:solidFill>
                       <a:srgbClr val="24272A"/>
                     </a:solidFill>
-                    <a:latin typeface="Arial"/>
+                    <a:latin typeface="Times New Roman"/>
                     <a:ea typeface="Arial"/>
                     <a:cs typeface="Arial"/>
                   </a:rPr>
@@ -13289,7 +13573,7 @@
                     <a:solidFill>
                       <a:srgbClr val="24272A"/>
                     </a:solidFill>
-                    <a:latin typeface="Arial"/>
+                    <a:latin typeface="Times New Roman"/>
                     <a:ea typeface="Arial"/>
                     <a:cs typeface="Arial"/>
                   </a:rPr>
@@ -13447,7 +13731,7 @@
                     <a:solidFill>
                       <a:srgbClr val="24272A"/>
                     </a:solidFill>
-                    <a:latin typeface="Arial"/>
+                    <a:latin typeface="Times New Roman"/>
                     <a:ea typeface="Arial"/>
                     <a:cs typeface="Arial"/>
                   </a:rPr>
@@ -13605,7 +13889,7 @@
                     <a:solidFill>
                       <a:srgbClr val="626A6F"/>
                     </a:solidFill>
-                    <a:latin typeface="Arial"/>
+                    <a:latin typeface="Times New Roman"/>
                     <a:ea typeface="Arial"/>
                     <a:cs typeface="Arial"/>
                   </a:rPr>
@@ -13660,6 +13944,10 @@
               <a:effectRef xmlns:a="http://schemas.openxmlformats.org/drawingml/2006/main" idx="10"/>
               <a:fontRef xmlns:a="http://schemas.openxmlformats.org/drawingml/2006/main" idx="major"/>
             </p:style>
+            <p:txBody xmlns:a="http://schemas.openxmlformats.org/drawingml/2006/main">
+              <a:bodyPr/>
+              <a:p/>
+            </p:txBody>
           </p:sp>
           <p:sp>
             <p:nvSpPr>
@@ -13707,6 +13995,10 @@
                 <a:round/>
               </a:ln>
             </p:spPr>
+            <p:txBody xmlns:a="http://schemas.openxmlformats.org/drawingml/2006/main">
+              <a:bodyPr/>
+              <a:p/>
+            </p:txBody>
           </p:sp>
           <p:sp>
             <p:nvSpPr>
@@ -13747,6 +14039,10 @@
               <a:effectRef xmlns:a="http://schemas.openxmlformats.org/drawingml/2006/main" idx="11"/>
               <a:fontRef xmlns:a="http://schemas.openxmlformats.org/drawingml/2006/main" idx="major"/>
             </p:style>
+            <p:txBody xmlns:a="http://schemas.openxmlformats.org/drawingml/2006/main">
+              <a:bodyPr/>
+              <a:p/>
+            </p:txBody>
           </p:sp>
           <p:sp>
             <p:nvSpPr>
@@ -13897,7 +14193,7 @@
                     <a:solidFill>
                       <a:srgbClr val="24272A"/>
                     </a:solidFill>
-                    <a:latin typeface="Arial"/>
+                    <a:latin typeface="Times New Roman"/>
                     <a:ea typeface="Arial"/>
                     <a:cs typeface="Arial"/>
                   </a:rPr>
@@ -13952,6 +14248,10 @@
               <a:effectRef xmlns:a="http://schemas.openxmlformats.org/drawingml/2006/main" idx="10"/>
               <a:fontRef xmlns:a="http://schemas.openxmlformats.org/drawingml/2006/main" idx="major"/>
             </p:style>
+            <p:txBody xmlns:a="http://schemas.openxmlformats.org/drawingml/2006/main">
+              <a:bodyPr/>
+              <a:p/>
+            </p:txBody>
           </p:sp>
           <p:sp>
             <p:nvSpPr>
@@ -13999,6 +14299,10 @@
                 <a:round/>
               </a:ln>
             </p:spPr>
+            <p:txBody xmlns:a="http://schemas.openxmlformats.org/drawingml/2006/main">
+              <a:bodyPr/>
+              <a:p/>
+            </p:txBody>
           </p:sp>
           <p:grpSp>
             <p:nvGrpSpPr>
@@ -14074,6 +14378,10 @@
                   <a:round/>
                 </a:ln>
               </p:spPr>
+              <p:txBody xmlns:a="http://schemas.openxmlformats.org/drawingml/2006/main">
+                <a:bodyPr/>
+                <a:p/>
+              </p:txBody>
             </p:sp>
             <p:sp>
               <p:nvSpPr>
@@ -14135,6 +14443,10 @@
                   <a:round/>
                 </a:ln>
               </p:spPr>
+              <p:txBody xmlns:a="http://schemas.openxmlformats.org/drawingml/2006/main">
+                <a:bodyPr/>
+                <a:p/>
+              </p:txBody>
             </p:sp>
             <p:sp>
               <p:nvSpPr>
@@ -14176,6 +14488,10 @@
                   <a:round/>
                 </a:ln>
               </p:spPr>
+              <p:txBody xmlns:a="http://schemas.openxmlformats.org/drawingml/2006/main">
+                <a:bodyPr/>
+                <a:p/>
+              </p:txBody>
             </p:sp>
             <p:sp>
               <p:nvSpPr>
@@ -14233,6 +14549,10 @@
                   <a:round/>
                 </a:ln>
               </p:spPr>
+              <p:txBody xmlns:a="http://schemas.openxmlformats.org/drawingml/2006/main">
+                <a:bodyPr/>
+                <a:p/>
+              </p:txBody>
             </p:sp>
             <p:sp>
               <p:nvSpPr>
@@ -14299,6 +14619,10 @@
                   <a:round/>
                 </a:ln>
               </p:spPr>
+              <p:txBody xmlns:a="http://schemas.openxmlformats.org/drawingml/2006/main">
+                <a:bodyPr/>
+                <a:p/>
+              </p:txBody>
             </p:sp>
             <p:sp>
               <p:nvSpPr>
@@ -14365,6 +14689,10 @@
                   <a:round/>
                 </a:ln>
               </p:spPr>
+              <p:txBody xmlns:a="http://schemas.openxmlformats.org/drawingml/2006/main">
+                <a:bodyPr/>
+                <a:p/>
+              </p:txBody>
             </p:sp>
           </p:grpSp>
           <p:sp>
@@ -14516,7 +14844,7 @@
                     <a:solidFill>
                       <a:srgbClr val="24272A"/>
                     </a:solidFill>
-                    <a:latin typeface="Arial"/>
+                    <a:latin typeface="Times New Roman"/>
                     <a:ea typeface="Arial"/>
                     <a:cs typeface="Arial"/>
                   </a:rPr>
@@ -14674,7 +15002,7 @@
                     <a:solidFill>
                       <a:srgbClr val="626A6F"/>
                     </a:solidFill>
-                    <a:latin typeface="Arial"/>
+                    <a:latin typeface="Times New Roman"/>
                     <a:ea typeface="Arial"/>
                     <a:cs typeface="Arial"/>
                   </a:rPr>

--- a/artifacts/semantic_revision_20261022/pptx/Figure09_Semantic.pptx
+++ b/artifacts/semantic_revision_20261022/pptx/Figure09_Semantic.pptx
@@ -3536,10 +3536,6 @@
                 <a:round/>
               </a:ln>
             </p:spPr>
-            <p:txBody xmlns:a="http://schemas.openxmlformats.org/drawingml/2006/main">
-              <a:bodyPr/>
-              <a:p/>
-            </p:txBody>
           </p:sp>
           <p:sp>
             <p:nvSpPr>
@@ -3690,7 +3686,7 @@
                     <a:solidFill>
                       <a:srgbClr val="FFFFFF"/>
                     </a:solidFill>
-                    <a:latin typeface="Times New Roman"/>
+                    <a:latin typeface="Arial"/>
                     <a:ea typeface="Arial"/>
                     <a:cs typeface="Arial"/>
                   </a:rPr>
@@ -3848,7 +3844,7 @@
                     <a:solidFill>
                       <a:srgbClr val="24272A"/>
                     </a:solidFill>
-                    <a:latin typeface="Times New Roman"/>
+                    <a:latin typeface="Comic Sans MS"/>
                     <a:ea typeface="Comic Sans MS"/>
                     <a:cs typeface="Comic Sans MS"/>
                   </a:rPr>
@@ -3911,10 +3907,6 @@
                   <a:round/>
                 </a:ln>
               </p:spPr>
-              <p:txBody xmlns:a="http://schemas.openxmlformats.org/drawingml/2006/main">
-                <a:bodyPr/>
-                <a:p/>
-              </p:txBody>
             </p:sp>
             <p:sp>
               <p:nvSpPr>
@@ -3956,10 +3948,6 @@
                   <a:round/>
                 </a:ln>
               </p:spPr>
-              <p:txBody xmlns:a="http://schemas.openxmlformats.org/drawingml/2006/main">
-                <a:bodyPr/>
-                <a:p/>
-              </p:txBody>
             </p:sp>
             <p:sp>
               <p:nvSpPr>
@@ -4001,10 +3989,6 @@
                   <a:round/>
                 </a:ln>
               </p:spPr>
-              <p:txBody xmlns:a="http://schemas.openxmlformats.org/drawingml/2006/main">
-                <a:bodyPr/>
-                <a:p/>
-              </p:txBody>
             </p:sp>
           </p:grpSp>
           <p:sp>
@@ -4156,7 +4140,7 @@
                     <a:solidFill>
                       <a:srgbClr val="24272A"/>
                     </a:solidFill>
-                    <a:latin typeface="Times New Roman"/>
+                    <a:latin typeface="Arial"/>
                     <a:ea typeface="Arial"/>
                     <a:cs typeface="Arial"/>
                   </a:rPr>
@@ -4208,10 +4192,6 @@
                 <a:round/>
               </a:ln>
             </p:spPr>
-            <p:txBody xmlns:a="http://schemas.openxmlformats.org/drawingml/2006/main">
-              <a:bodyPr/>
-              <a:p/>
-            </p:txBody>
           </p:sp>
           <p:sp>
             <p:nvSpPr>
@@ -4362,7 +4342,7 @@
                     <a:solidFill>
                       <a:srgbClr val="626A6F"/>
                     </a:solidFill>
-                    <a:latin typeface="Times New Roman"/>
+                    <a:latin typeface="Arial"/>
                     <a:ea typeface="Arial"/>
                     <a:cs typeface="Arial"/>
                   </a:rPr>
@@ -4520,7 +4500,7 @@
                     <a:solidFill>
                       <a:srgbClr val="626A6F"/>
                     </a:solidFill>
-                    <a:latin typeface="Times New Roman"/>
+                    <a:latin typeface="Arial"/>
                     <a:ea typeface="Arial"/>
                     <a:cs typeface="Arial"/>
                   </a:rPr>
@@ -4752,10 +4732,6 @@
                 <a:round/>
               </a:ln>
             </p:spPr>
-            <p:txBody xmlns:a="http://schemas.openxmlformats.org/drawingml/2006/main">
-              <a:bodyPr/>
-              <a:p/>
-            </p:txBody>
           </p:sp>
           <p:grpSp>
             <p:nvGrpSpPr>
@@ -4811,10 +4787,6 @@
                   <a:round/>
                 </a:ln>
               </p:spPr>
-              <p:txBody xmlns:a="http://schemas.openxmlformats.org/drawingml/2006/main">
-                <a:bodyPr/>
-                <a:p/>
-              </p:txBody>
             </p:sp>
             <p:sp>
               <p:nvSpPr>
@@ -4856,10 +4828,6 @@
                   <a:round/>
                 </a:ln>
               </p:spPr>
-              <p:txBody xmlns:a="http://schemas.openxmlformats.org/drawingml/2006/main">
-                <a:bodyPr/>
-                <a:p/>
-              </p:txBody>
             </p:sp>
             <p:sp>
               <p:nvSpPr>
@@ -4901,10 +4869,6 @@
                   <a:round/>
                 </a:ln>
               </p:spPr>
-              <p:txBody xmlns:a="http://schemas.openxmlformats.org/drawingml/2006/main">
-                <a:bodyPr/>
-                <a:p/>
-              </p:txBody>
             </p:sp>
           </p:grpSp>
           <p:sp>
@@ -5056,7 +5020,7 @@
                     <a:solidFill>
                       <a:srgbClr val="24272A"/>
                     </a:solidFill>
-                    <a:latin typeface="Times New Roman"/>
+                    <a:latin typeface="Arial"/>
                     <a:ea typeface="Arial"/>
                     <a:cs typeface="Arial"/>
                   </a:rPr>
@@ -5111,10 +5075,6 @@
               <a:effectRef xmlns:a="http://schemas.openxmlformats.org/drawingml/2006/main" idx="10"/>
               <a:fontRef xmlns:a="http://schemas.openxmlformats.org/drawingml/2006/main" idx="major"/>
             </p:style>
-            <p:txBody xmlns:a="http://schemas.openxmlformats.org/drawingml/2006/main">
-              <a:bodyPr/>
-              <a:p/>
-            </p:txBody>
           </p:sp>
           <p:sp>
             <p:nvSpPr>
@@ -5162,10 +5122,6 @@
                 <a:round/>
               </a:ln>
             </p:spPr>
-            <p:txBody xmlns:a="http://schemas.openxmlformats.org/drawingml/2006/main">
-              <a:bodyPr/>
-              <a:p/>
-            </p:txBody>
           </p:sp>
           <p:sp>
             <p:nvSpPr>
@@ -5316,7 +5272,7 @@
                     <a:solidFill>
                       <a:srgbClr val="24272A"/>
                     </a:solidFill>
-                    <a:latin typeface="Times New Roman"/>
+                    <a:latin typeface="Arial"/>
                     <a:ea typeface="Arial"/>
                     <a:cs typeface="Arial"/>
                   </a:rPr>
@@ -5362,10 +5318,6 @@
               <a:effectRef xmlns:a="http://schemas.openxmlformats.org/drawingml/2006/main" idx="11"/>
               <a:fontRef xmlns:a="http://schemas.openxmlformats.org/drawingml/2006/main" idx="major"/>
             </p:style>
-            <p:txBody xmlns:a="http://schemas.openxmlformats.org/drawingml/2006/main">
-              <a:bodyPr/>
-              <a:p/>
-            </p:txBody>
           </p:sp>
           <p:sp>
             <p:nvSpPr>
@@ -5516,7 +5468,7 @@
                     <a:solidFill>
                       <a:srgbClr val="3F6C85"/>
                     </a:solidFill>
-                    <a:latin typeface="Times New Roman"/>
+                    <a:latin typeface="Arial"/>
                     <a:ea typeface="Arial"/>
                     <a:cs typeface="Arial"/>
                   </a:rPr>
@@ -5748,10 +5700,6 @@
                 <a:round/>
               </a:ln>
             </p:spPr>
-            <p:txBody xmlns:a="http://schemas.openxmlformats.org/drawingml/2006/main">
-              <a:bodyPr/>
-              <a:p/>
-            </p:txBody>
           </p:sp>
           <p:sp>
             <p:nvSpPr>
@@ -5796,10 +5744,6 @@
                 <a:round/>
               </a:ln>
             </p:spPr>
-            <p:txBody xmlns:a="http://schemas.openxmlformats.org/drawingml/2006/main">
-              <a:bodyPr/>
-              <a:p/>
-            </p:txBody>
           </p:sp>
           <p:sp>
             <p:nvSpPr>
@@ -5950,7 +5894,7 @@
                     <a:solidFill>
                       <a:srgbClr val="24272A"/>
                     </a:solidFill>
-                    <a:latin typeface="Times New Roman"/>
+                    <a:latin typeface="Arial"/>
                     <a:ea typeface="Arial"/>
                     <a:cs typeface="Arial"/>
                   </a:rPr>
@@ -6005,10 +5949,6 @@
                 <a:round/>
               </a:ln>
             </p:spPr>
-            <p:txBody xmlns:a="http://schemas.openxmlformats.org/drawingml/2006/main">
-              <a:bodyPr/>
-              <a:p/>
-            </p:txBody>
           </p:sp>
           <p:sp>
             <p:nvSpPr>
@@ -6159,7 +6099,7 @@
                     <a:solidFill>
                       <a:srgbClr val="FFFFFF"/>
                     </a:solidFill>
-                    <a:latin typeface="Times New Roman"/>
+                    <a:latin typeface="Arial"/>
                     <a:ea typeface="Arial"/>
                     <a:cs typeface="Arial"/>
                   </a:rPr>
@@ -6317,7 +6257,7 @@
                     <a:solidFill>
                       <a:srgbClr val="24272A"/>
                     </a:solidFill>
-                    <a:latin typeface="Times New Roman"/>
+                    <a:latin typeface="Comic Sans MS"/>
                     <a:ea typeface="Comic Sans MS"/>
                     <a:cs typeface="Comic Sans MS"/>
                   </a:rPr>
@@ -6380,10 +6320,6 @@
                   <a:round/>
                 </a:ln>
               </p:spPr>
-              <p:txBody xmlns:a="http://schemas.openxmlformats.org/drawingml/2006/main">
-                <a:bodyPr/>
-                <a:p/>
-              </p:txBody>
             </p:sp>
             <p:sp>
               <p:nvSpPr>
@@ -6425,10 +6361,6 @@
                   <a:round/>
                 </a:ln>
               </p:spPr>
-              <p:txBody xmlns:a="http://schemas.openxmlformats.org/drawingml/2006/main">
-                <a:bodyPr/>
-                <a:p/>
-              </p:txBody>
             </p:sp>
             <p:sp>
               <p:nvSpPr>
@@ -6470,10 +6402,6 @@
                   <a:round/>
                 </a:ln>
               </p:spPr>
-              <p:txBody xmlns:a="http://schemas.openxmlformats.org/drawingml/2006/main">
-                <a:bodyPr/>
-                <a:p/>
-              </p:txBody>
             </p:sp>
             <p:sp>
               <p:nvSpPr>
@@ -6515,10 +6443,6 @@
                   <a:round/>
                 </a:ln>
               </p:spPr>
-              <p:txBody xmlns:a="http://schemas.openxmlformats.org/drawingml/2006/main">
-                <a:bodyPr/>
-                <a:p/>
-              </p:txBody>
             </p:sp>
             <p:sp>
               <p:nvSpPr>
@@ -6560,10 +6484,6 @@
                   <a:round/>
                 </a:ln>
               </p:spPr>
-              <p:txBody xmlns:a="http://schemas.openxmlformats.org/drawingml/2006/main">
-                <a:bodyPr/>
-                <a:p/>
-              </p:txBody>
             </p:sp>
             <p:sp>
               <p:nvSpPr>
@@ -6605,10 +6525,6 @@
                   <a:round/>
                 </a:ln>
               </p:spPr>
-              <p:txBody xmlns:a="http://schemas.openxmlformats.org/drawingml/2006/main">
-                <a:bodyPr/>
-                <a:p/>
-              </p:txBody>
             </p:sp>
             <p:sp>
               <p:nvSpPr>
@@ -6650,10 +6566,6 @@
                   <a:round/>
                 </a:ln>
               </p:spPr>
-              <p:txBody xmlns:a="http://schemas.openxmlformats.org/drawingml/2006/main">
-                <a:bodyPr/>
-                <a:p/>
-              </p:txBody>
             </p:sp>
             <p:sp>
               <p:nvSpPr>
@@ -6695,10 +6607,6 @@
                   <a:round/>
                 </a:ln>
               </p:spPr>
-              <p:txBody xmlns:a="http://schemas.openxmlformats.org/drawingml/2006/main">
-                <a:bodyPr/>
-                <a:p/>
-              </p:txBody>
             </p:sp>
             <p:sp>
               <p:nvSpPr>
@@ -6740,10 +6648,6 @@
                   <a:round/>
                 </a:ln>
               </p:spPr>
-              <p:txBody xmlns:a="http://schemas.openxmlformats.org/drawingml/2006/main">
-                <a:bodyPr/>
-                <a:p/>
-              </p:txBody>
             </p:sp>
           </p:grpSp>
           <p:sp>
@@ -6895,7 +6799,7 @@
                     <a:solidFill>
                       <a:srgbClr val="24272A"/>
                     </a:solidFill>
-                    <a:latin typeface="Times New Roman"/>
+                    <a:latin typeface="Arial"/>
                     <a:ea typeface="Arial"/>
                     <a:cs typeface="Arial"/>
                   </a:rPr>
@@ -6958,10 +6862,6 @@
                   <a:round/>
                 </a:ln>
               </p:spPr>
-              <p:txBody xmlns:a="http://schemas.openxmlformats.org/drawingml/2006/main">
-                <a:bodyPr/>
-                <a:p/>
-              </p:txBody>
             </p:sp>
             <p:sp>
               <p:nvSpPr>
@@ -7003,10 +6903,6 @@
                   <a:round/>
                 </a:ln>
               </p:spPr>
-              <p:txBody xmlns:a="http://schemas.openxmlformats.org/drawingml/2006/main">
-                <a:bodyPr/>
-                <a:p/>
-              </p:txBody>
             </p:sp>
             <p:sp>
               <p:nvSpPr>
@@ -7048,10 +6944,6 @@
                   <a:round/>
                 </a:ln>
               </p:spPr>
-              <p:txBody xmlns:a="http://schemas.openxmlformats.org/drawingml/2006/main">
-                <a:bodyPr/>
-                <a:p/>
-              </p:txBody>
             </p:sp>
             <p:sp>
               <p:nvSpPr>
@@ -7093,10 +6985,6 @@
                   <a:round/>
                 </a:ln>
               </p:spPr>
-              <p:txBody xmlns:a="http://schemas.openxmlformats.org/drawingml/2006/main">
-                <a:bodyPr/>
-                <a:p/>
-              </p:txBody>
             </p:sp>
             <p:sp>
               <p:nvSpPr>
@@ -7138,10 +7026,6 @@
                   <a:round/>
                 </a:ln>
               </p:spPr>
-              <p:txBody xmlns:a="http://schemas.openxmlformats.org/drawingml/2006/main">
-                <a:bodyPr/>
-                <a:p/>
-              </p:txBody>
             </p:sp>
             <p:sp>
               <p:nvSpPr>
@@ -7183,10 +7067,6 @@
                   <a:round/>
                 </a:ln>
               </p:spPr>
-              <p:txBody xmlns:a="http://schemas.openxmlformats.org/drawingml/2006/main">
-                <a:bodyPr/>
-                <a:p/>
-              </p:txBody>
             </p:sp>
           </p:grpSp>
           <p:sp>
@@ -7338,7 +7218,7 @@
                     <a:solidFill>
                       <a:srgbClr val="24272A"/>
                     </a:solidFill>
-                    <a:latin typeface="Times New Roman"/>
+                    <a:latin typeface="Arial"/>
                     <a:ea typeface="Arial"/>
                     <a:cs typeface="Arial"/>
                   </a:rPr>
@@ -7414,10 +7294,6 @@
                   <a:round/>
                 </a:ln>
               </p:spPr>
-              <p:txBody xmlns:a="http://schemas.openxmlformats.org/drawingml/2006/main">
-                <a:bodyPr/>
-                <a:p/>
-              </p:txBody>
             </p:sp>
             <p:sp>
               <p:nvSpPr>
@@ -7472,10 +7348,6 @@
                   <a:round/>
                 </a:ln>
               </p:spPr>
-              <p:txBody xmlns:a="http://schemas.openxmlformats.org/drawingml/2006/main">
-                <a:bodyPr/>
-                <a:p/>
-              </p:txBody>
             </p:sp>
           </p:grpSp>
           <p:sp>
@@ -7627,7 +7499,7 @@
                     <a:solidFill>
                       <a:srgbClr val="24272A"/>
                     </a:solidFill>
-                    <a:latin typeface="Times New Roman"/>
+                    <a:latin typeface="Arial"/>
                     <a:ea typeface="Arial"/>
                     <a:cs typeface="Arial"/>
                   </a:rPr>
@@ -7693,10 +7565,6 @@
                   <a:round/>
                 </a:ln>
               </p:spPr>
-              <p:txBody xmlns:a="http://schemas.openxmlformats.org/drawingml/2006/main">
-                <a:bodyPr/>
-                <a:p/>
-              </p:txBody>
             </p:sp>
             <p:sp>
               <p:nvSpPr>
@@ -7741,10 +7609,6 @@
                   <a:round/>
                 </a:ln>
               </p:spPr>
-              <p:txBody xmlns:a="http://schemas.openxmlformats.org/drawingml/2006/main">
-                <a:bodyPr/>
-                <a:p/>
-              </p:txBody>
             </p:sp>
             <p:sp>
               <p:nvSpPr>
@@ -7802,10 +7666,6 @@
                   <a:round/>
                 </a:ln>
               </p:spPr>
-              <p:txBody xmlns:a="http://schemas.openxmlformats.org/drawingml/2006/main">
-                <a:bodyPr/>
-                <a:p/>
-              </p:txBody>
             </p:sp>
             <p:sp>
               <p:nvSpPr>
@@ -7857,10 +7717,6 @@
                   <a:round/>
                 </a:ln>
               </p:spPr>
-              <p:txBody xmlns:a="http://schemas.openxmlformats.org/drawingml/2006/main">
-                <a:bodyPr/>
-                <a:p/>
-              </p:txBody>
             </p:sp>
             <p:sp>
               <p:nvSpPr>
@@ -7910,10 +7766,6 @@
                   <a:round/>
                 </a:ln>
               </p:spPr>
-              <p:txBody xmlns:a="http://schemas.openxmlformats.org/drawingml/2006/main">
-                <a:bodyPr/>
-                <a:p/>
-              </p:txBody>
             </p:sp>
           </p:grpSp>
           <p:sp>
@@ -8065,7 +7917,7 @@
                     <a:solidFill>
                       <a:srgbClr val="24272A"/>
                     </a:solidFill>
-                    <a:latin typeface="Times New Roman"/>
+                    <a:latin typeface="Arial"/>
                     <a:ea typeface="Arial"/>
                     <a:cs typeface="Arial"/>
                   </a:rPr>
@@ -8223,7 +8075,7 @@
                     <a:solidFill>
                       <a:srgbClr val="626A6F"/>
                     </a:solidFill>
-                    <a:latin typeface="Times New Roman"/>
+                    <a:latin typeface="Arial"/>
                     <a:ea typeface="Arial"/>
                     <a:cs typeface="Arial"/>
                   </a:rPr>
@@ -8263,10 +8115,6 @@
                 <a:round/>
               </a:ln>
             </p:spPr>
-            <p:txBody xmlns:a="http://schemas.openxmlformats.org/drawingml/2006/main">
-              <a:bodyPr/>
-              <a:p/>
-            </p:txBody>
           </p:sp>
           <p:sp>
             <p:nvSpPr>
@@ -8417,7 +8265,7 @@
                     <a:solidFill>
                       <a:srgbClr val="328372"/>
                     </a:solidFill>
-                    <a:latin typeface="Times New Roman"/>
+                    <a:latin typeface="Arial"/>
                     <a:ea typeface="Arial"/>
                     <a:cs typeface="Arial"/>
                   </a:rPr>
@@ -8575,7 +8423,7 @@
                     <a:solidFill>
                       <a:srgbClr val="24272A"/>
                     </a:solidFill>
-                    <a:latin typeface="Times New Roman"/>
+                    <a:latin typeface="Arial"/>
                     <a:ea typeface="Arial"/>
                     <a:cs typeface="Arial"/>
                   </a:rPr>
@@ -8807,10 +8655,6 @@
                 <a:round/>
               </a:ln>
             </p:spPr>
-            <p:txBody xmlns:a="http://schemas.openxmlformats.org/drawingml/2006/main">
-              <a:bodyPr/>
-              <a:p/>
-            </p:txBody>
           </p:sp>
           <p:sp>
             <p:nvSpPr>
@@ -8961,7 +8805,7 @@
                     <a:solidFill>
                       <a:srgbClr val="626A6F"/>
                     </a:solidFill>
-                    <a:latin typeface="Times New Roman"/>
+                    <a:latin typeface="Arial"/>
                     <a:ea typeface="Arial"/>
                     <a:cs typeface="Arial"/>
                   </a:rPr>
@@ -8984,7 +8828,7 @@
                     <a:solidFill>
                       <a:srgbClr val="626A6F"/>
                     </a:solidFill>
-                    <a:latin typeface="Times New Roman"/>
+                    <a:latin typeface="Arial"/>
                     <a:ea typeface="Arial"/>
                     <a:cs typeface="Arial"/>
                   </a:rPr>
@@ -9024,10 +8868,6 @@
                 <a:round/>
               </a:ln>
             </p:spPr>
-            <p:txBody xmlns:a="http://schemas.openxmlformats.org/drawingml/2006/main">
-              <a:bodyPr/>
-              <a:p/>
-            </p:txBody>
           </p:sp>
           <p:sp>
             <p:nvSpPr>
@@ -9178,7 +9018,7 @@
                     <a:solidFill>
                       <a:srgbClr val="B76C4D"/>
                     </a:solidFill>
-                    <a:latin typeface="Times New Roman"/>
+                    <a:latin typeface="Arial"/>
                     <a:ea typeface="Arial"/>
                     <a:cs typeface="Arial"/>
                   </a:rPr>
@@ -9336,7 +9176,7 @@
                     <a:solidFill>
                       <a:srgbClr val="24272A"/>
                     </a:solidFill>
-                    <a:latin typeface="Times New Roman"/>
+                    <a:latin typeface="Arial"/>
                     <a:ea typeface="Arial"/>
                     <a:cs typeface="Arial"/>
                   </a:rPr>
@@ -9568,10 +9408,6 @@
                 <a:round/>
               </a:ln>
             </p:spPr>
-            <p:txBody xmlns:a="http://schemas.openxmlformats.org/drawingml/2006/main">
-              <a:bodyPr/>
-              <a:p/>
-            </p:txBody>
           </p:sp>
           <p:sp>
             <p:nvSpPr>
@@ -9722,7 +9558,7 @@
                     <a:solidFill>
                       <a:srgbClr val="626A6F"/>
                     </a:solidFill>
-                    <a:latin typeface="Times New Roman"/>
+                    <a:latin typeface="Arial"/>
                     <a:ea typeface="Arial"/>
                     <a:cs typeface="Arial"/>
                   </a:rPr>
@@ -9745,7 +9581,7 @@
                     <a:solidFill>
                       <a:srgbClr val="626A6F"/>
                     </a:solidFill>
-                    <a:latin typeface="Times New Roman"/>
+                    <a:latin typeface="Arial"/>
                     <a:ea typeface="Arial"/>
                     <a:cs typeface="Arial"/>
                   </a:rPr>
@@ -9800,10 +9636,6 @@
                 <a:round/>
               </a:ln>
             </p:spPr>
-            <p:txBody xmlns:a="http://schemas.openxmlformats.org/drawingml/2006/main">
-              <a:bodyPr/>
-              <a:p/>
-            </p:txBody>
           </p:sp>
           <p:sp>
             <p:nvSpPr>
@@ -9954,7 +9786,7 @@
                     <a:solidFill>
                       <a:srgbClr val="626A6F"/>
                     </a:solidFill>
-                    <a:latin typeface="Times New Roman"/>
+                    <a:latin typeface="Arial"/>
                     <a:ea typeface="Arial"/>
                     <a:cs typeface="Arial"/>
                   </a:rPr>
@@ -10009,10 +9841,6 @@
                 <a:round/>
               </a:ln>
             </p:spPr>
-            <p:txBody xmlns:a="http://schemas.openxmlformats.org/drawingml/2006/main">
-              <a:bodyPr/>
-              <a:p/>
-            </p:txBody>
           </p:sp>
           <p:sp>
             <p:nvSpPr>
@@ -10163,7 +9991,7 @@
                     <a:solidFill>
                       <a:srgbClr val="FFFFFF"/>
                     </a:solidFill>
-                    <a:latin typeface="Times New Roman"/>
+                    <a:latin typeface="Arial"/>
                     <a:ea typeface="Arial"/>
                     <a:cs typeface="Arial"/>
                   </a:rPr>
@@ -10321,7 +10149,7 @@
                     <a:solidFill>
                       <a:srgbClr val="24272A"/>
                     </a:solidFill>
-                    <a:latin typeface="Times New Roman"/>
+                    <a:latin typeface="Comic Sans MS"/>
                     <a:ea typeface="Comic Sans MS"/>
                     <a:cs typeface="Comic Sans MS"/>
                   </a:rPr>
@@ -10426,10 +10254,6 @@
                   <a:round/>
                 </a:ln>
               </p:spPr>
-              <p:txBody xmlns:a="http://schemas.openxmlformats.org/drawingml/2006/main">
-                <a:bodyPr/>
-                <a:p/>
-              </p:txBody>
             </p:sp>
             <p:sp>
               <p:nvSpPr>
@@ -10484,10 +10308,6 @@
                   <a:round/>
                 </a:ln>
               </p:spPr>
-              <p:txBody xmlns:a="http://schemas.openxmlformats.org/drawingml/2006/main">
-                <a:bodyPr/>
-                <a:p/>
-              </p:txBody>
             </p:sp>
             <p:sp>
               <p:nvSpPr>
@@ -10532,10 +10352,6 @@
                   <a:round/>
                 </a:ln>
               </p:spPr>
-              <p:txBody xmlns:a="http://schemas.openxmlformats.org/drawingml/2006/main">
-                <a:bodyPr/>
-                <a:p/>
-              </p:txBody>
             </p:sp>
           </p:grpSp>
           <p:grpSp>
@@ -10605,10 +10421,6 @@
                   <a:round/>
                 </a:ln>
               </p:spPr>
-              <p:txBody xmlns:a="http://schemas.openxmlformats.org/drawingml/2006/main">
-                <a:bodyPr/>
-                <a:p/>
-              </p:txBody>
             </p:sp>
             <p:sp>
               <p:nvSpPr>
@@ -10663,10 +10475,6 @@
                   <a:round/>
                 </a:ln>
               </p:spPr>
-              <p:txBody xmlns:a="http://schemas.openxmlformats.org/drawingml/2006/main">
-                <a:bodyPr/>
-                <a:p/>
-              </p:txBody>
             </p:sp>
             <p:sp>
               <p:nvSpPr>
@@ -10721,10 +10529,6 @@
                   <a:round/>
                 </a:ln>
               </p:spPr>
-              <p:txBody xmlns:a="http://schemas.openxmlformats.org/drawingml/2006/main">
-                <a:bodyPr/>
-                <a:p/>
-              </p:txBody>
             </p:sp>
             <p:sp>
               <p:nvSpPr>
@@ -10779,10 +10583,6 @@
                   <a:round/>
                 </a:ln>
               </p:spPr>
-              <p:txBody xmlns:a="http://schemas.openxmlformats.org/drawingml/2006/main">
-                <a:bodyPr/>
-                <a:p/>
-              </p:txBody>
             </p:sp>
             <p:sp>
               <p:nvSpPr>
@@ -10851,10 +10651,6 @@
                   <a:round/>
                 </a:ln>
               </p:spPr>
-              <p:txBody xmlns:a="http://schemas.openxmlformats.org/drawingml/2006/main">
-                <a:bodyPr/>
-                <a:p/>
-              </p:txBody>
             </p:sp>
             <p:sp>
               <p:nvSpPr>
@@ -10933,10 +10729,6 @@
                   <a:round/>
                 </a:ln>
               </p:spPr>
-              <p:txBody xmlns:a="http://schemas.openxmlformats.org/drawingml/2006/main">
-                <a:bodyPr/>
-                <a:p/>
-              </p:txBody>
             </p:sp>
           </p:grpSp>
           <p:sp>
@@ -11088,7 +10880,7 @@
                     <a:solidFill>
                       <a:srgbClr val="24272A"/>
                     </a:solidFill>
-                    <a:latin typeface="Times New Roman"/>
+                    <a:latin typeface="Arial"/>
                     <a:ea typeface="Arial"/>
                     <a:cs typeface="Arial"/>
                   </a:rPr>
@@ -11246,7 +11038,7 @@
                     <a:solidFill>
                       <a:srgbClr val="24272A"/>
                     </a:solidFill>
-                    <a:latin typeface="Times New Roman"/>
+                    <a:latin typeface="Arial"/>
                     <a:ea typeface="Arial"/>
                     <a:cs typeface="Arial"/>
                   </a:rPr>
@@ -11298,10 +11090,6 @@
                 <a:round/>
               </a:ln>
             </p:spPr>
-            <p:txBody xmlns:a="http://schemas.openxmlformats.org/drawingml/2006/main">
-              <a:bodyPr/>
-              <a:p/>
-            </p:txBody>
           </p:sp>
           <p:sp>
             <p:nvSpPr>
@@ -11452,7 +11240,7 @@
                     <a:solidFill>
                       <a:srgbClr val="328372"/>
                     </a:solidFill>
-                    <a:latin typeface="Times New Roman"/>
+                    <a:latin typeface="Arial"/>
                     <a:ea typeface="Arial"/>
                     <a:cs typeface="Arial"/>
                   </a:rPr>
@@ -11610,7 +11398,7 @@
                     <a:solidFill>
                       <a:srgbClr val="24272A"/>
                     </a:solidFill>
-                    <a:latin typeface="Times New Roman"/>
+                    <a:latin typeface="Arial"/>
                     <a:ea typeface="Arial"/>
                     <a:cs typeface="Arial"/>
                   </a:rPr>
@@ -11659,10 +11447,6 @@
                 <a:round/>
               </a:ln>
             </p:spPr>
-            <p:txBody xmlns:a="http://schemas.openxmlformats.org/drawingml/2006/main">
-              <a:bodyPr/>
-              <a:p/>
-            </p:txBody>
           </p:sp>
           <p:sp>
             <p:nvSpPr>
@@ -11704,10 +11488,6 @@
                 <a:round/>
               </a:ln>
             </p:spPr>
-            <p:txBody xmlns:a="http://schemas.openxmlformats.org/drawingml/2006/main">
-              <a:bodyPr/>
-              <a:p/>
-            </p:txBody>
           </p:sp>
           <p:sp>
             <p:nvSpPr>
@@ -11858,7 +11638,7 @@
                     <a:solidFill>
                       <a:srgbClr val="B76C4D"/>
                     </a:solidFill>
-                    <a:latin typeface="Times New Roman"/>
+                    <a:latin typeface="Arial"/>
                     <a:ea typeface="Arial"/>
                     <a:cs typeface="Arial"/>
                   </a:rPr>
@@ -12016,7 +11796,7 @@
                     <a:solidFill>
                       <a:srgbClr val="24272A"/>
                     </a:solidFill>
-                    <a:latin typeface="Times New Roman"/>
+                    <a:latin typeface="Arial"/>
                     <a:ea typeface="Arial"/>
                     <a:cs typeface="Arial"/>
                   </a:rPr>
@@ -12092,10 +11872,6 @@
               <a:effectRef xmlns:a="http://schemas.openxmlformats.org/drawingml/2006/main" idx="10"/>
               <a:fontRef xmlns:a="http://schemas.openxmlformats.org/drawingml/2006/main" idx="major"/>
             </p:style>
-            <p:txBody xmlns:a="http://schemas.openxmlformats.org/drawingml/2006/main">
-              <a:bodyPr/>
-              <a:p/>
-            </p:txBody>
           </p:sp>
           <p:sp>
             <p:nvSpPr>
@@ -12143,10 +11919,6 @@
                 <a:round/>
               </a:ln>
             </p:spPr>
-            <p:txBody xmlns:a="http://schemas.openxmlformats.org/drawingml/2006/main">
-              <a:bodyPr/>
-              <a:p/>
-            </p:txBody>
           </p:sp>
           <p:sp>
             <p:nvSpPr>
@@ -12194,10 +11966,6 @@
               <a:effectRef xmlns:a="http://schemas.openxmlformats.org/drawingml/2006/main" idx="10"/>
               <a:fontRef xmlns:a="http://schemas.openxmlformats.org/drawingml/2006/main" idx="major"/>
             </p:style>
-            <p:txBody xmlns:a="http://schemas.openxmlformats.org/drawingml/2006/main">
-              <a:bodyPr/>
-              <a:p/>
-            </p:txBody>
           </p:sp>
           <p:sp>
             <p:nvSpPr>
@@ -12245,10 +12013,6 @@
                 <a:round/>
               </a:ln>
             </p:spPr>
-            <p:txBody xmlns:a="http://schemas.openxmlformats.org/drawingml/2006/main">
-              <a:bodyPr/>
-              <a:p/>
-            </p:txBody>
           </p:sp>
           <p:sp>
             <p:nvSpPr>
@@ -12296,10 +12060,6 @@
               <a:effectRef xmlns:a="http://schemas.openxmlformats.org/drawingml/2006/main" idx="10"/>
               <a:fontRef xmlns:a="http://schemas.openxmlformats.org/drawingml/2006/main" idx="major"/>
             </p:style>
-            <p:txBody xmlns:a="http://schemas.openxmlformats.org/drawingml/2006/main">
-              <a:bodyPr/>
-              <a:p/>
-            </p:txBody>
           </p:sp>
           <p:sp>
             <p:nvSpPr>
@@ -12347,10 +12107,6 @@
                 <a:round/>
               </a:ln>
             </p:spPr>
-            <p:txBody xmlns:a="http://schemas.openxmlformats.org/drawingml/2006/main">
-              <a:bodyPr/>
-              <a:p/>
-            </p:txBody>
           </p:sp>
           <p:sp>
             <p:nvSpPr>
@@ -12410,10 +12166,6 @@
               <a:effectRef xmlns:a="http://schemas.openxmlformats.org/drawingml/2006/main" idx="10"/>
               <a:fontRef xmlns:a="http://schemas.openxmlformats.org/drawingml/2006/main" idx="major"/>
             </p:style>
-            <p:txBody xmlns:a="http://schemas.openxmlformats.org/drawingml/2006/main">
-              <a:bodyPr/>
-              <a:p/>
-            </p:txBody>
           </p:sp>
           <p:sp>
             <p:nvSpPr>
@@ -12461,10 +12213,6 @@
                 <a:round/>
               </a:ln>
             </p:spPr>
-            <p:txBody xmlns:a="http://schemas.openxmlformats.org/drawingml/2006/main">
-              <a:bodyPr/>
-              <a:p/>
-            </p:txBody>
           </p:sp>
           <p:sp>
             <p:nvSpPr>
@@ -12497,10 +12245,6 @@
                 <a:round/>
               </a:ln>
             </p:spPr>
-            <p:txBody xmlns:a="http://schemas.openxmlformats.org/drawingml/2006/main">
-              <a:bodyPr/>
-              <a:p/>
-            </p:txBody>
           </p:sp>
           <p:sp>
             <p:nvSpPr>
@@ -12651,7 +12395,7 @@
                     <a:solidFill>
                       <a:srgbClr val="B76C4D"/>
                     </a:solidFill>
-                    <a:latin typeface="Times New Roman"/>
+                    <a:latin typeface="Arial"/>
                     <a:ea typeface="Arial"/>
                     <a:cs typeface="Arial"/>
                   </a:rPr>
@@ -12712,10 +12456,6 @@
               <a:effectRef xmlns:a="http://schemas.openxmlformats.org/drawingml/2006/main" idx="11"/>
               <a:fontRef xmlns:a="http://schemas.openxmlformats.org/drawingml/2006/main" idx="major"/>
             </p:style>
-            <p:txBody xmlns:a="http://schemas.openxmlformats.org/drawingml/2006/main">
-              <a:bodyPr/>
-              <a:p/>
-            </p:txBody>
           </p:sp>
           <p:grpSp>
             <p:nvGrpSpPr>
@@ -12791,10 +12531,6 @@
                   <a:round/>
                 </a:ln>
               </p:spPr>
-              <p:txBody xmlns:a="http://schemas.openxmlformats.org/drawingml/2006/main">
-                <a:bodyPr/>
-                <a:p/>
-              </p:txBody>
             </p:sp>
             <p:sp>
               <p:nvSpPr>
@@ -12856,10 +12592,6 @@
                   <a:round/>
                 </a:ln>
               </p:spPr>
-              <p:txBody xmlns:a="http://schemas.openxmlformats.org/drawingml/2006/main">
-                <a:bodyPr/>
-                <a:p/>
-              </p:txBody>
             </p:sp>
             <p:sp>
               <p:nvSpPr>
@@ -12901,10 +12633,6 @@
                   <a:round/>
                 </a:ln>
               </p:spPr>
-              <p:txBody xmlns:a="http://schemas.openxmlformats.org/drawingml/2006/main">
-                <a:bodyPr/>
-                <a:p/>
-              </p:txBody>
             </p:sp>
             <p:sp>
               <p:nvSpPr>
@@ -12962,10 +12690,6 @@
                   <a:round/>
                 </a:ln>
               </p:spPr>
-              <p:txBody xmlns:a="http://schemas.openxmlformats.org/drawingml/2006/main">
-                <a:bodyPr/>
-                <a:p/>
-              </p:txBody>
             </p:sp>
             <p:sp>
               <p:nvSpPr>
@@ -13032,10 +12756,6 @@
                   <a:round/>
                 </a:ln>
               </p:spPr>
-              <p:txBody xmlns:a="http://schemas.openxmlformats.org/drawingml/2006/main">
-                <a:bodyPr/>
-                <a:p/>
-              </p:txBody>
             </p:sp>
             <p:sp>
               <p:nvSpPr>
@@ -13102,10 +12822,6 @@
                   <a:round/>
                 </a:ln>
               </p:spPr>
-              <p:txBody xmlns:a="http://schemas.openxmlformats.org/drawingml/2006/main">
-                <a:bodyPr/>
-                <a:p/>
-              </p:txBody>
             </p:sp>
           </p:grpSp>
           <p:sp>
@@ -13257,7 +12973,7 @@
                     <a:solidFill>
                       <a:srgbClr val="24272A"/>
                     </a:solidFill>
-                    <a:latin typeface="Times New Roman"/>
+                    <a:latin typeface="Comic Sans MS"/>
                     <a:ea typeface="Comic Sans MS"/>
                     <a:cs typeface="Comic Sans MS"/>
                   </a:rPr>
@@ -13415,7 +13131,7 @@
                     <a:solidFill>
                       <a:srgbClr val="24272A"/>
                     </a:solidFill>
-                    <a:latin typeface="Times New Roman"/>
+                    <a:latin typeface="Arial"/>
                     <a:ea typeface="Arial"/>
                     <a:cs typeface="Arial"/>
                   </a:rPr>
@@ -13573,7 +13289,7 @@
                     <a:solidFill>
                       <a:srgbClr val="24272A"/>
                     </a:solidFill>
-                    <a:latin typeface="Times New Roman"/>
+                    <a:latin typeface="Arial"/>
                     <a:ea typeface="Arial"/>
                     <a:cs typeface="Arial"/>
                   </a:rPr>
@@ -13731,7 +13447,7 @@
                     <a:solidFill>
                       <a:srgbClr val="24272A"/>
                     </a:solidFill>
-                    <a:latin typeface="Times New Roman"/>
+                    <a:latin typeface="Arial"/>
                     <a:ea typeface="Arial"/>
                     <a:cs typeface="Arial"/>
                   </a:rPr>
@@ -13889,7 +13605,7 @@
                     <a:solidFill>
                       <a:srgbClr val="626A6F"/>
                     </a:solidFill>
-                    <a:latin typeface="Times New Roman"/>
+                    <a:latin typeface="Arial"/>
                     <a:ea typeface="Arial"/>
                     <a:cs typeface="Arial"/>
                   </a:rPr>
@@ -13944,10 +13660,6 @@
               <a:effectRef xmlns:a="http://schemas.openxmlformats.org/drawingml/2006/main" idx="10"/>
               <a:fontRef xmlns:a="http://schemas.openxmlformats.org/drawingml/2006/main" idx="major"/>
             </p:style>
-            <p:txBody xmlns:a="http://schemas.openxmlformats.org/drawingml/2006/main">
-              <a:bodyPr/>
-              <a:p/>
-            </p:txBody>
           </p:sp>
           <p:sp>
             <p:nvSpPr>
@@ -13995,10 +13707,6 @@
                 <a:round/>
               </a:ln>
             </p:spPr>
-            <p:txBody xmlns:a="http://schemas.openxmlformats.org/drawingml/2006/main">
-              <a:bodyPr/>
-              <a:p/>
-            </p:txBody>
           </p:sp>
           <p:sp>
             <p:nvSpPr>
@@ -14039,10 +13747,6 @@
               <a:effectRef xmlns:a="http://schemas.openxmlformats.org/drawingml/2006/main" idx="11"/>
               <a:fontRef xmlns:a="http://schemas.openxmlformats.org/drawingml/2006/main" idx="major"/>
             </p:style>
-            <p:txBody xmlns:a="http://schemas.openxmlformats.org/drawingml/2006/main">
-              <a:bodyPr/>
-              <a:p/>
-            </p:txBody>
           </p:sp>
           <p:sp>
             <p:nvSpPr>
@@ -14193,7 +13897,7 @@
                     <a:solidFill>
                       <a:srgbClr val="24272A"/>
                     </a:solidFill>
-                    <a:latin typeface="Times New Roman"/>
+                    <a:latin typeface="Arial"/>
                     <a:ea typeface="Arial"/>
                     <a:cs typeface="Arial"/>
                   </a:rPr>
@@ -14248,10 +13952,6 @@
               <a:effectRef xmlns:a="http://schemas.openxmlformats.org/drawingml/2006/main" idx="10"/>
               <a:fontRef xmlns:a="http://schemas.openxmlformats.org/drawingml/2006/main" idx="major"/>
             </p:style>
-            <p:txBody xmlns:a="http://schemas.openxmlformats.org/drawingml/2006/main">
-              <a:bodyPr/>
-              <a:p/>
-            </p:txBody>
           </p:sp>
           <p:sp>
             <p:nvSpPr>
@@ -14299,10 +13999,6 @@
                 <a:round/>
               </a:ln>
             </p:spPr>
-            <p:txBody xmlns:a="http://schemas.openxmlformats.org/drawingml/2006/main">
-              <a:bodyPr/>
-              <a:p/>
-            </p:txBody>
           </p:sp>
           <p:grpSp>
             <p:nvGrpSpPr>
@@ -14378,10 +14074,6 @@
                   <a:round/>
                 </a:ln>
               </p:spPr>
-              <p:txBody xmlns:a="http://schemas.openxmlformats.org/drawingml/2006/main">
-                <a:bodyPr/>
-                <a:p/>
-              </p:txBody>
             </p:sp>
             <p:sp>
               <p:nvSpPr>
@@ -14443,10 +14135,6 @@
                   <a:round/>
                 </a:ln>
               </p:spPr>
-              <p:txBody xmlns:a="http://schemas.openxmlformats.org/drawingml/2006/main">
-                <a:bodyPr/>
-                <a:p/>
-              </p:txBody>
             </p:sp>
             <p:sp>
               <p:nvSpPr>
@@ -14488,10 +14176,6 @@
                   <a:round/>
                 </a:ln>
               </p:spPr>
-              <p:txBody xmlns:a="http://schemas.openxmlformats.org/drawingml/2006/main">
-                <a:bodyPr/>
-                <a:p/>
-              </p:txBody>
             </p:sp>
             <p:sp>
               <p:nvSpPr>
@@ -14549,10 +14233,6 @@
                   <a:round/>
                 </a:ln>
               </p:spPr>
-              <p:txBody xmlns:a="http://schemas.openxmlformats.org/drawingml/2006/main">
-                <a:bodyPr/>
-                <a:p/>
-              </p:txBody>
             </p:sp>
             <p:sp>
               <p:nvSpPr>
@@ -14619,10 +14299,6 @@
                   <a:round/>
                 </a:ln>
               </p:spPr>
-              <p:txBody xmlns:a="http://schemas.openxmlformats.org/drawingml/2006/main">
-                <a:bodyPr/>
-                <a:p/>
-              </p:txBody>
             </p:sp>
             <p:sp>
               <p:nvSpPr>
@@ -14689,10 +14365,6 @@
                   <a:round/>
                 </a:ln>
               </p:spPr>
-              <p:txBody xmlns:a="http://schemas.openxmlformats.org/drawingml/2006/main">
-                <a:bodyPr/>
-                <a:p/>
-              </p:txBody>
             </p:sp>
           </p:grpSp>
           <p:sp>
@@ -14844,7 +14516,7 @@
                     <a:solidFill>
                       <a:srgbClr val="24272A"/>
                     </a:solidFill>
-                    <a:latin typeface="Times New Roman"/>
+                    <a:latin typeface="Arial"/>
                     <a:ea typeface="Arial"/>
                     <a:cs typeface="Arial"/>
                   </a:rPr>
@@ -15002,7 +14674,7 @@
                     <a:solidFill>
                       <a:srgbClr val="626A6F"/>
                     </a:solidFill>
-                    <a:latin typeface="Times New Roman"/>
+                    <a:latin typeface="Arial"/>
                     <a:ea typeface="Arial"/>
                     <a:cs typeface="Arial"/>
                   </a:rPr>
